--- a/metro/metro-b01-cover.pptx
+++ b/metro/metro-b01-cover.pptx
@@ -3426,9 +3426,9 @@
                 <a:solidFill>
                   <a:srgbClr val="14161A"/>
                 </a:solidFill>
-                <a:latin typeface="Space Grotesk"/>
-                <a:ea typeface="Space Grotesk"/>
-                <a:cs typeface="Space Grotesk"/>
+                <a:latin typeface="HK Grotesk"/>
+                <a:ea typeface="HK Grotesk"/>
+                <a:cs typeface="HK Grotesk"/>
               </a:rPr>
               <a:t>North &amp; Oak</a:t>
             </a:r>
@@ -3535,9 +3535,9 @@
                 <a:solidFill>
                   <a:srgbClr val="14161A"/>
                 </a:solidFill>
-                <a:latin typeface="Space Grotesk"/>
-                <a:ea typeface="Space Grotesk"/>
-                <a:cs typeface="Space Grotesk"/>
+                <a:latin typeface="HK Grotesk"/>
+                <a:ea typeface="HK Grotesk"/>
+                <a:cs typeface="HK Grotesk"/>
               </a:rPr>
               <a:t>THE</a:t>
             </a:r>
@@ -3553,9 +3553,9 @@
                 <a:solidFill>
                   <a:srgbClr val="14161A"/>
                 </a:solidFill>
-                <a:latin typeface="Space Grotesk"/>
-                <a:ea typeface="Space Grotesk"/>
-                <a:cs typeface="Space Grotesk"/>
+                <a:latin typeface="HK Grotesk"/>
+                <a:ea typeface="HK Grotesk"/>
+                <a:cs typeface="HK Grotesk"/>
               </a:rPr>
               <a:t>METRO</a:t>
             </a:r>
@@ -3571,9 +3571,9 @@
                 <a:solidFill>
                   <a:srgbClr val="14161A"/>
                 </a:solidFill>
-                <a:latin typeface="Space Grotesk"/>
-                <a:ea typeface="Space Grotesk"/>
-                <a:cs typeface="Space Grotesk"/>
+                <a:latin typeface="HK Grotesk"/>
+                <a:ea typeface="HK Grotesk"/>
+                <a:cs typeface="HK Grotesk"/>
               </a:rPr>
               <a:t>EDIT.</a:t>
             </a:r>
@@ -3641,9 +3641,9 @@
                 <a:solidFill>
                   <a:srgbClr val="2D5BE3"/>
                 </a:solidFill>
-                <a:latin typeface="Space Grotesk"/>
-                <a:ea typeface="Space Grotesk"/>
-                <a:cs typeface="Space Grotesk"/>
+                <a:latin typeface="HK Grotesk"/>
+                <a:ea typeface="HK Grotesk"/>
+                <a:cs typeface="HK Grotesk"/>
               </a:rPr>
               <a:t>40</a:t>
             </a:r>
@@ -3711,9 +3711,9 @@
                 <a:solidFill>
                   <a:srgbClr val="14161A"/>
                 </a:solidFill>
-                <a:latin typeface="Space Grotesk"/>
-                <a:ea typeface="Space Grotesk"/>
-                <a:cs typeface="Space Grotesk"/>
+                <a:latin typeface="HK Grotesk"/>
+                <a:ea typeface="HK Grotesk"/>
+                <a:cs typeface="HK Grotesk"/>
               </a:rPr>
               <a:t>05</a:t>
             </a:r>
@@ -3781,9 +3781,9 @@
                 <a:solidFill>
                   <a:srgbClr val="14161A"/>
                 </a:solidFill>
-                <a:latin typeface="Space Grotesk"/>
-                <a:ea typeface="Space Grotesk"/>
-                <a:cs typeface="Space Grotesk"/>
+                <a:latin typeface="HK Grotesk"/>
+                <a:ea typeface="HK Grotesk"/>
+                <a:cs typeface="HK Grotesk"/>
               </a:rPr>
               <a:t>Social / Print</a:t>
             </a:r>
@@ -3851,9 +3851,9 @@
                 <a:solidFill>
                   <a:srgbClr val="14161A"/>
                 </a:solidFill>
-                <a:latin typeface="Space Grotesk"/>
-                <a:ea typeface="Space Grotesk"/>
-                <a:cs typeface="Space Grotesk"/>
+                <a:latin typeface="HK Grotesk"/>
+                <a:ea typeface="HK Grotesk"/>
+                <a:cs typeface="HK Grotesk"/>
               </a:rPr>
               <a:t>01 / 2026</a:t>
             </a:r>
@@ -3890,9 +3890,9 @@
                 <a:solidFill>
                   <a:srgbClr val="24272E"/>
                 </a:solidFill>
-                <a:latin typeface="Space Grotesk"/>
-                <a:ea typeface="Space Grotesk"/>
-                <a:cs typeface="Space Grotesk"/>
+                <a:latin typeface="HK Grotesk"/>
+                <a:ea typeface="HK Grotesk"/>
+                <a:cs typeface="HK Grotesk"/>
               </a:rPr>
               <a:t>Forty templates. One precise system — built on a grid, run on the numbers. Everything a downtown condo &amp; loft specialist needs to move listings fast and look sharp doing it.</a:t>
             </a:r>
